--- a/ai/src/ppt dataset/Blue and White Modern Cyber Security Presentation.pptx
+++ b/ai/src/ppt dataset/Blue and White Modern Cyber Security Presentation.pptx
@@ -3136,6 +3136,10 @@
             </a:stretch>
           </a:blipFill>
         </p:spPr>
+        <p:txBody>
+          <a:bodyPr/>
+          <a:p/>
+        </p:txBody>
       </p:sp>
       <p:sp>
         <p:nvSpPr>
@@ -3188,6 +3192,10 @@
             </a:stretch>
           </a:blipFill>
         </p:spPr>
+        <p:txBody>
+          <a:bodyPr/>
+          <a:p/>
+        </p:txBody>
       </p:sp>
       <p:grpSp>
         <p:nvGrpSpPr>
@@ -3488,6 +3496,10 @@
             </a:stretch>
           </a:blipFill>
         </p:spPr>
+        <p:txBody>
+          <a:bodyPr/>
+          <a:p/>
+        </p:txBody>
       </p:sp>
       <p:sp>
         <p:nvSpPr>
@@ -3509,37 +3521,7 @@
             <a:spAutoFit/>
           </a:bodyPr>
           <a:lstStyle/>
-          <a:p>
-            <a:pPr algn="l">
-              <a:lnSpc>
-                <a:spcPts val="8199"/>
-              </a:lnSpc>
-            </a:pPr>
-            <a:r>
-              <a:rPr lang="en-US" sz="9010" b="true">
-                <a:solidFill>
-                  <a:srgbClr val="011142"/>
-                </a:solidFill>
-                <a:latin typeface="TT Firs Neue Bold"/>
-                <a:ea typeface="TT Firs Neue Bold"/>
-                <a:cs typeface="TT Firs Neue Bold"/>
-                <a:sym typeface="TT Firs Neue Bold"/>
-              </a:rPr>
-              <a:t>Cyber S</a:t>
-            </a:r>
-            <a:r>
-              <a:rPr lang="en-US" sz="9010" b="true">
-                <a:solidFill>
-                  <a:srgbClr val="011142"/>
-                </a:solidFill>
-                <a:latin typeface="TT Firs Neue Bold"/>
-                <a:ea typeface="TT Firs Neue Bold"/>
-                <a:cs typeface="TT Firs Neue Bold"/>
-                <a:sym typeface="TT Firs Neue Bold"/>
-              </a:rPr>
-              <a:t>ecurity</a:t>
-            </a:r>
-          </a:p>
+          <a:p/>
         </p:txBody>
       </p:sp>
       <p:sp>
@@ -3562,25 +3544,7 @@
             <a:spAutoFit/>
           </a:bodyPr>
           <a:lstStyle/>
-          <a:p>
-            <a:pPr algn="l">
-              <a:lnSpc>
-                <a:spcPts val="8199"/>
-              </a:lnSpc>
-            </a:pPr>
-            <a:r>
-              <a:rPr lang="en-US" sz="9010">
-                <a:solidFill>
-                  <a:srgbClr val="011142"/>
-                </a:solidFill>
-                <a:latin typeface="TT Firs Neue"/>
-                <a:ea typeface="TT Firs Neue"/>
-                <a:cs typeface="TT Firs Neue"/>
-                <a:sym typeface="TT Firs Neue"/>
-              </a:rPr>
-              <a:t>Basics of</a:t>
-            </a:r>
-          </a:p>
+          <a:p/>
         </p:txBody>
       </p:sp>
       <p:sp>
@@ -3603,25 +3567,7 @@
             <a:spAutoFit/>
           </a:bodyPr>
           <a:lstStyle/>
-          <a:p>
-            <a:pPr algn="l">
-              <a:lnSpc>
-                <a:spcPts val="3728"/>
-              </a:lnSpc>
-            </a:pPr>
-            <a:r>
-              <a:rPr lang="en-US" sz="2663">
-                <a:solidFill>
-                  <a:srgbClr val="011142"/>
-                </a:solidFill>
-                <a:latin typeface="TT Firs Neue"/>
-                <a:ea typeface="TT Firs Neue"/>
-                <a:cs typeface="TT Firs Neue"/>
-                <a:sym typeface="TT Firs Neue"/>
-              </a:rPr>
-              <a:t>An Introduction to Cyber Threats and Defense Strategies</a:t>
-            </a:r>
-          </a:p>
+          <a:p/>
         </p:txBody>
       </p:sp>
       <p:sp>
@@ -3675,6 +3621,10 @@
             </a:stretch>
           </a:blipFill>
         </p:spPr>
+        <p:txBody>
+          <a:bodyPr/>
+          <a:p/>
+        </p:txBody>
       </p:sp>
     </p:spTree>
   </p:cSld>
@@ -3883,6 +3833,10 @@
             </a:stretch>
           </a:blipFill>
         </p:spPr>
+        <p:txBody>
+          <a:bodyPr/>
+          <a:p/>
+        </p:txBody>
       </p:sp>
       <p:sp>
         <p:nvSpPr>
@@ -3935,6 +3889,10 @@
             </a:stretch>
           </a:blipFill>
         </p:spPr>
+        <p:txBody>
+          <a:bodyPr/>
+          <a:p/>
+        </p:txBody>
       </p:sp>
       <p:sp>
         <p:nvSpPr>
@@ -3992,6 +3950,10 @@
             <a:miter/>
           </a:ln>
         </p:spPr>
+        <p:txBody>
+          <a:bodyPr/>
+          <a:p/>
+        </p:txBody>
       </p:sp>
       <p:sp>
         <p:nvSpPr>
@@ -4049,6 +4011,10 @@
             <a:miter/>
           </a:ln>
         </p:spPr>
+        <p:txBody>
+          <a:bodyPr/>
+          <a:p/>
+        </p:txBody>
       </p:sp>
       <p:sp>
         <p:nvSpPr>
@@ -4106,6 +4072,10 @@
             <a:miter/>
           </a:ln>
         </p:spPr>
+        <p:txBody>
+          <a:bodyPr/>
+          <a:p/>
+        </p:txBody>
       </p:sp>
       <p:sp>
         <p:nvSpPr>
@@ -4163,6 +4133,10 @@
             <a:miter/>
           </a:ln>
         </p:spPr>
+        <p:txBody>
+          <a:bodyPr/>
+          <a:p/>
+        </p:txBody>
       </p:sp>
       <p:sp>
         <p:nvSpPr>
@@ -4184,28 +4158,7 @@
             <a:spAutoFit/>
           </a:bodyPr>
           <a:lstStyle/>
-          <a:p>
-            <a:pPr algn="l" marL="0" indent="0" lvl="0">
-              <a:lnSpc>
-                <a:spcPts val="3728"/>
-              </a:lnSpc>
-              <a:spcBef>
-                <a:spcPct val="0"/>
-              </a:spcBef>
-            </a:pPr>
-            <a:r>
-              <a:rPr lang="en-US" sz="2663" strike="noStrike">
-                <a:solidFill>
-                  <a:srgbClr val="011142"/>
-                </a:solidFill>
-                <a:latin typeface="TT Firs Neue"/>
-                <a:ea typeface="TT Firs Neue"/>
-                <a:cs typeface="TT Firs Neue"/>
-                <a:sym typeface="TT Firs Neue"/>
-              </a:rPr>
-              <a:t>123 Anywhere ST., Any City, ST 12345</a:t>
-            </a:r>
-          </a:p>
+          <a:p/>
         </p:txBody>
       </p:sp>
       <p:sp>
@@ -4264,6 +4217,10 @@
             <a:miter/>
           </a:ln>
         </p:spPr>
+        <p:txBody>
+          <a:bodyPr/>
+          <a:p/>
+        </p:txBody>
       </p:sp>
       <p:sp>
         <p:nvSpPr>
@@ -4321,6 +4278,10 @@
             <a:miter/>
           </a:ln>
         </p:spPr>
+        <p:txBody>
+          <a:bodyPr/>
+          <a:p/>
+        </p:txBody>
       </p:sp>
       <p:sp>
         <p:nvSpPr>
@@ -4342,25 +4303,7 @@
             <a:spAutoFit/>
           </a:bodyPr>
           <a:lstStyle/>
-          <a:p>
-            <a:pPr algn="l">
-              <a:lnSpc>
-                <a:spcPts val="8199"/>
-              </a:lnSpc>
-            </a:pPr>
-            <a:r>
-              <a:rPr lang="en-US" sz="9010" b="true">
-                <a:solidFill>
-                  <a:srgbClr val="011142"/>
-                </a:solidFill>
-                <a:latin typeface="TT Firs Neue Bold"/>
-                <a:ea typeface="TT Firs Neue Bold"/>
-                <a:cs typeface="TT Firs Neue Bold"/>
-                <a:sym typeface="TT Firs Neue Bold"/>
-              </a:rPr>
-              <a:t>Thank You</a:t>
-            </a:r>
-          </a:p>
+          <a:p/>
         </p:txBody>
       </p:sp>
       <p:sp>
@@ -4383,28 +4326,7 @@
             <a:spAutoFit/>
           </a:bodyPr>
           <a:lstStyle/>
-          <a:p>
-            <a:pPr algn="l" marL="0" indent="0" lvl="0">
-              <a:lnSpc>
-                <a:spcPts val="3728"/>
-              </a:lnSpc>
-              <a:spcBef>
-                <a:spcPct val="0"/>
-              </a:spcBef>
-            </a:pPr>
-            <a:r>
-              <a:rPr lang="en-US" sz="2663" strike="noStrike" u="none">
-                <a:solidFill>
-                  <a:srgbClr val="011142"/>
-                </a:solidFill>
-                <a:latin typeface="TT Firs Neue"/>
-                <a:ea typeface="TT Firs Neue"/>
-                <a:cs typeface="TT Firs Neue"/>
-                <a:sym typeface="TT Firs Neue"/>
-              </a:rPr>
-              <a:t>+123-456-7890</a:t>
-            </a:r>
-          </a:p>
+          <a:p/>
         </p:txBody>
       </p:sp>
       <p:sp>
@@ -4427,28 +4349,7 @@
             <a:spAutoFit/>
           </a:bodyPr>
           <a:lstStyle/>
-          <a:p>
-            <a:pPr algn="l" marL="0" indent="0" lvl="0">
-              <a:lnSpc>
-                <a:spcPts val="3728"/>
-              </a:lnSpc>
-              <a:spcBef>
-                <a:spcPct val="0"/>
-              </a:spcBef>
-            </a:pPr>
-            <a:r>
-              <a:rPr lang="en-US" sz="2663" strike="noStrike" u="none">
-                <a:solidFill>
-                  <a:srgbClr val="011142"/>
-                </a:solidFill>
-                <a:latin typeface="TT Firs Neue"/>
-                <a:ea typeface="TT Firs Neue"/>
-                <a:cs typeface="TT Firs Neue"/>
-                <a:sym typeface="TT Firs Neue"/>
-              </a:rPr>
-              <a:t>www.reallygreatsite.com</a:t>
-            </a:r>
-          </a:p>
+          <a:p/>
         </p:txBody>
       </p:sp>
       <p:sp>
@@ -4471,28 +4372,7 @@
             <a:spAutoFit/>
           </a:bodyPr>
           <a:lstStyle/>
-          <a:p>
-            <a:pPr algn="l" marL="0" indent="0" lvl="0">
-              <a:lnSpc>
-                <a:spcPts val="3728"/>
-              </a:lnSpc>
-              <a:spcBef>
-                <a:spcPct val="0"/>
-              </a:spcBef>
-            </a:pPr>
-            <a:r>
-              <a:rPr lang="en-US" sz="2663" strike="noStrike">
-                <a:solidFill>
-                  <a:srgbClr val="011142"/>
-                </a:solidFill>
-                <a:latin typeface="TT Firs Neue"/>
-                <a:ea typeface="TT Firs Neue"/>
-                <a:cs typeface="TT Firs Neue"/>
-                <a:sym typeface="TT Firs Neue"/>
-              </a:rPr>
-              <a:t>hello@reallygreatsite.com</a:t>
-            </a:r>
-          </a:p>
+          <a:p/>
         </p:txBody>
       </p:sp>
     </p:spTree>
@@ -4707,6 +4587,10 @@
             <a:miter/>
           </a:ln>
         </p:spPr>
+        <p:txBody>
+          <a:bodyPr/>
+          <a:p/>
+        </p:txBody>
       </p:sp>
       <p:grpSp>
         <p:nvGrpSpPr>
@@ -4841,6 +4725,10 @@
             </a:stretch>
           </a:blipFill>
         </p:spPr>
+        <p:txBody>
+          <a:bodyPr/>
+          <a:p/>
+        </p:txBody>
       </p:sp>
       <p:sp>
         <p:nvSpPr>
@@ -4862,37 +4750,7 @@
             <a:spAutoFit/>
           </a:bodyPr>
           <a:lstStyle/>
-          <a:p>
-            <a:pPr algn="l">
-              <a:lnSpc>
-                <a:spcPts val="5915"/>
-              </a:lnSpc>
-            </a:pPr>
-            <a:r>
-              <a:rPr lang="en-US" sz="6500" b="true">
-                <a:solidFill>
-                  <a:srgbClr val="011142"/>
-                </a:solidFill>
-                <a:latin typeface="TT Firs Neue Bold"/>
-                <a:ea typeface="TT Firs Neue Bold"/>
-                <a:cs typeface="TT Firs Neue Bold"/>
-                <a:sym typeface="TT Firs Neue Bold"/>
-              </a:rPr>
-              <a:t>Cyber S</a:t>
-            </a:r>
-            <a:r>
-              <a:rPr lang="en-US" sz="6500" b="true">
-                <a:solidFill>
-                  <a:srgbClr val="011142"/>
-                </a:solidFill>
-                <a:latin typeface="TT Firs Neue Bold"/>
-                <a:ea typeface="TT Firs Neue Bold"/>
-                <a:cs typeface="TT Firs Neue Bold"/>
-                <a:sym typeface="TT Firs Neue Bold"/>
-              </a:rPr>
-              <a:t>ecurity?</a:t>
-            </a:r>
-          </a:p>
+          <a:p/>
         </p:txBody>
       </p:sp>
       <p:sp>
@@ -4915,25 +4773,7 @@
             <a:spAutoFit/>
           </a:bodyPr>
           <a:lstStyle/>
-          <a:p>
-            <a:pPr algn="l">
-              <a:lnSpc>
-                <a:spcPts val="5915"/>
-              </a:lnSpc>
-            </a:pPr>
-            <a:r>
-              <a:rPr lang="en-US" sz="6500">
-                <a:solidFill>
-                  <a:srgbClr val="011142"/>
-                </a:solidFill>
-                <a:latin typeface="TT Firs Neue"/>
-                <a:ea typeface="TT Firs Neue"/>
-                <a:cs typeface="TT Firs Neue"/>
-                <a:sym typeface="TT Firs Neue"/>
-              </a:rPr>
-              <a:t>What is</a:t>
-            </a:r>
-          </a:p>
+          <a:p/>
         </p:txBody>
       </p:sp>
       <p:sp>
@@ -4956,25 +4796,7 @@
             <a:spAutoFit/>
           </a:bodyPr>
           <a:lstStyle/>
-          <a:p>
-            <a:pPr algn="l">
-              <a:lnSpc>
-                <a:spcPts val="2800"/>
-              </a:lnSpc>
-            </a:pPr>
-            <a:r>
-              <a:rPr lang="en-US" sz="2000">
-                <a:solidFill>
-                  <a:srgbClr val="011142"/>
-                </a:solidFill>
-                <a:latin typeface="TT Firs Neue"/>
-                <a:ea typeface="TT Firs Neue"/>
-                <a:cs typeface="TT Firs Neue"/>
-                <a:sym typeface="TT Firs Neue"/>
-              </a:rPr>
-              <a:t>Lorem ipsum dolor sit amet, consectetur adipiscing elit, sed do eiusmod tempor incididunt ut labore et dolore magna aliqua. Ut enim ad minim veniam, quis nostrud exercitation ullamco laboris nisi ut aliquip ex ea commodo consequat.</a:t>
-            </a:r>
-          </a:p>
+          <a:p/>
         </p:txBody>
       </p:sp>
       <p:sp>
@@ -4997,25 +4819,7 @@
             <a:spAutoFit/>
           </a:bodyPr>
           <a:lstStyle/>
-          <a:p>
-            <a:pPr algn="l">
-              <a:lnSpc>
-                <a:spcPts val="2800"/>
-              </a:lnSpc>
-            </a:pPr>
-            <a:r>
-              <a:rPr lang="en-US" sz="2000">
-                <a:solidFill>
-                  <a:srgbClr val="011142"/>
-                </a:solidFill>
-                <a:latin typeface="TT Firs Neue"/>
-                <a:ea typeface="TT Firs Neue"/>
-                <a:cs typeface="TT Firs Neue"/>
-                <a:sym typeface="TT Firs Neue"/>
-              </a:rPr>
-              <a:t>Lorem ipsum dolor sit amet, consectetur adipiscing elit, sed do eiusmod tempor incididunt ut labore et dolore magna aliqua. Ut enim ad minim veniam, quis nostrud exercitation ullamco laboris nisi ut aliquip ex ea commodo consequat.</a:t>
-            </a:r>
-          </a:p>
+          <a:p/>
         </p:txBody>
       </p:sp>
       <p:sp>
@@ -5069,6 +4873,10 @@
             </a:stretch>
           </a:blipFill>
         </p:spPr>
+        <p:txBody>
+          <a:bodyPr/>
+          <a:p/>
+        </p:txBody>
       </p:sp>
       <p:sp>
         <p:nvSpPr>
@@ -5121,6 +4929,10 @@
             </a:stretch>
           </a:blipFill>
         </p:spPr>
+        <p:txBody>
+          <a:bodyPr/>
+          <a:p/>
+        </p:txBody>
       </p:sp>
     </p:spTree>
   </p:cSld>
@@ -6019,6 +5831,10 @@
             <a:miter/>
           </a:ln>
         </p:spPr>
+        <p:txBody>
+          <a:bodyPr/>
+          <a:p/>
+        </p:txBody>
       </p:sp>
       <p:sp>
         <p:nvSpPr>
@@ -6076,6 +5892,10 @@
             <a:miter/>
           </a:ln>
         </p:spPr>
+        <p:txBody>
+          <a:bodyPr/>
+          <a:p/>
+        </p:txBody>
       </p:sp>
       <p:sp>
         <p:nvSpPr>
@@ -6097,37 +5917,7 @@
             <a:spAutoFit/>
           </a:bodyPr>
           <a:lstStyle/>
-          <a:p>
-            <a:pPr algn="l">
-              <a:lnSpc>
-                <a:spcPts val="5915"/>
-              </a:lnSpc>
-            </a:pPr>
-            <a:r>
-              <a:rPr lang="en-US" sz="6500" b="true">
-                <a:solidFill>
-                  <a:srgbClr val="011142"/>
-                </a:solidFill>
-                <a:latin typeface="TT Firs Neue Bold"/>
-                <a:ea typeface="TT Firs Neue Bold"/>
-                <a:cs typeface="TT Firs Neue Bold"/>
-                <a:sym typeface="TT Firs Neue Bold"/>
-              </a:rPr>
-              <a:t>Cyber Th</a:t>
-            </a:r>
-            <a:r>
-              <a:rPr lang="en-US" sz="6500" b="true">
-                <a:solidFill>
-                  <a:srgbClr val="011142"/>
-                </a:solidFill>
-                <a:latin typeface="TT Firs Neue Bold"/>
-                <a:ea typeface="TT Firs Neue Bold"/>
-                <a:cs typeface="TT Firs Neue Bold"/>
-                <a:sym typeface="TT Firs Neue Bold"/>
-              </a:rPr>
-              <a:t>reats</a:t>
-            </a:r>
-          </a:p>
+          <a:p/>
         </p:txBody>
       </p:sp>
       <p:sp>
@@ -6150,25 +5940,7 @@
             <a:spAutoFit/>
           </a:bodyPr>
           <a:lstStyle/>
-          <a:p>
-            <a:pPr algn="l">
-              <a:lnSpc>
-                <a:spcPts val="5915"/>
-              </a:lnSpc>
-            </a:pPr>
-            <a:r>
-              <a:rPr lang="en-US" sz="6500">
-                <a:solidFill>
-                  <a:srgbClr val="011142"/>
-                </a:solidFill>
-                <a:latin typeface="TT Firs Neue"/>
-                <a:ea typeface="TT Firs Neue"/>
-                <a:cs typeface="TT Firs Neue"/>
-                <a:sym typeface="TT Firs Neue"/>
-              </a:rPr>
-              <a:t>Common</a:t>
-            </a:r>
-          </a:p>
+          <a:p/>
         </p:txBody>
       </p:sp>
       <p:sp>
@@ -6191,25 +5963,7 @@
             <a:spAutoFit/>
           </a:bodyPr>
           <a:lstStyle/>
-          <a:p>
-            <a:pPr algn="l">
-              <a:lnSpc>
-                <a:spcPts val="2280"/>
-              </a:lnSpc>
-            </a:pPr>
-            <a:r>
-              <a:rPr lang="en-US" sz="2000">
-                <a:solidFill>
-                  <a:srgbClr val="011142"/>
-                </a:solidFill>
-                <a:latin typeface="TT Firs Neue"/>
-                <a:ea typeface="TT Firs Neue"/>
-                <a:cs typeface="TT Firs Neue"/>
-                <a:sym typeface="TT Firs Neue"/>
-              </a:rPr>
-              <a:t>Lorem ipsum dolor sit amet, consectetur adipiscing elit, sed do eiusmod tempor incididunt ut labore et dolore magna aliqua.</a:t>
-            </a:r>
-          </a:p>
+          <a:p/>
         </p:txBody>
       </p:sp>
       <p:sp>
@@ -6232,28 +5986,7 @@
             <a:spAutoFit/>
           </a:bodyPr>
           <a:lstStyle/>
-          <a:p>
-            <a:pPr algn="l" marL="0" indent="0" lvl="0">
-              <a:lnSpc>
-                <a:spcPts val="2280"/>
-              </a:lnSpc>
-              <a:spcBef>
-                <a:spcPct val="0"/>
-              </a:spcBef>
-            </a:pPr>
-            <a:r>
-              <a:rPr lang="en-US" sz="2000" strike="noStrike" u="none">
-                <a:solidFill>
-                  <a:srgbClr val="011142"/>
-                </a:solidFill>
-                <a:latin typeface="TT Firs Neue"/>
-                <a:ea typeface="TT Firs Neue"/>
-                <a:cs typeface="TT Firs Neue"/>
-                <a:sym typeface="TT Firs Neue"/>
-              </a:rPr>
-              <a:t>Lorem ipsum dolor sit amet, consectetur adipiscing elit, sed do eiusmod tempor incididunt ut labore et dolore magna aliqua.</a:t>
-            </a:r>
-          </a:p>
+          <a:p/>
         </p:txBody>
       </p:sp>
       <p:sp>
@@ -6276,28 +6009,7 @@
             <a:spAutoFit/>
           </a:bodyPr>
           <a:lstStyle/>
-          <a:p>
-            <a:pPr algn="l" marL="0" indent="0" lvl="0">
-              <a:lnSpc>
-                <a:spcPts val="2280"/>
-              </a:lnSpc>
-              <a:spcBef>
-                <a:spcPct val="0"/>
-              </a:spcBef>
-            </a:pPr>
-            <a:r>
-              <a:rPr lang="en-US" sz="2000" strike="noStrike" u="none">
-                <a:solidFill>
-                  <a:srgbClr val="011142"/>
-                </a:solidFill>
-                <a:latin typeface="TT Firs Neue"/>
-                <a:ea typeface="TT Firs Neue"/>
-                <a:cs typeface="TT Firs Neue"/>
-                <a:sym typeface="TT Firs Neue"/>
-              </a:rPr>
-              <a:t>Lorem ipsum dolor sit amet, consectetur adipiscing elit, sed do eiusmod tempor incididunt ut labore et dolore magna aliqua.</a:t>
-            </a:r>
-          </a:p>
+          <a:p/>
         </p:txBody>
       </p:sp>
       <p:sp>
@@ -6320,25 +6032,7 @@
             <a:spAutoFit/>
           </a:bodyPr>
           <a:lstStyle/>
-          <a:p>
-            <a:pPr algn="l">
-              <a:lnSpc>
-                <a:spcPts val="2280"/>
-              </a:lnSpc>
-            </a:pPr>
-            <a:r>
-              <a:rPr lang="en-US" sz="2000">
-                <a:solidFill>
-                  <a:srgbClr val="011142"/>
-                </a:solidFill>
-                <a:latin typeface="TT Firs Neue"/>
-                <a:ea typeface="TT Firs Neue"/>
-                <a:cs typeface="TT Firs Neue"/>
-                <a:sym typeface="TT Firs Neue"/>
-              </a:rPr>
-              <a:t>Lorem ipsum dolor sit amet, consectetur adipiscing elit, sed do eiusmod tempor incididunt ut labore et dolore magna aliqua.</a:t>
-            </a:r>
-          </a:p>
+          <a:p/>
         </p:txBody>
       </p:sp>
       <p:sp>
@@ -6361,28 +6055,7 @@
             <a:spAutoFit/>
           </a:bodyPr>
           <a:lstStyle/>
-          <a:p>
-            <a:pPr algn="l" marL="0" indent="0" lvl="0">
-              <a:lnSpc>
-                <a:spcPts val="2280"/>
-              </a:lnSpc>
-              <a:spcBef>
-                <a:spcPct val="0"/>
-              </a:spcBef>
-            </a:pPr>
-            <a:r>
-              <a:rPr lang="en-US" sz="2000" strike="noStrike" u="none">
-                <a:solidFill>
-                  <a:srgbClr val="011142"/>
-                </a:solidFill>
-                <a:latin typeface="TT Firs Neue"/>
-                <a:ea typeface="TT Firs Neue"/>
-                <a:cs typeface="TT Firs Neue"/>
-                <a:sym typeface="TT Firs Neue"/>
-              </a:rPr>
-              <a:t>Lorem ipsum dolor sit amet, consectetur adipiscing elit, sed do eiusmod tempor incididunt ut labore et dolore magna aliqua.</a:t>
-            </a:r>
-          </a:p>
+          <a:p/>
         </p:txBody>
       </p:sp>
       <p:sp>
@@ -6436,6 +6109,10 @@
             </a:stretch>
           </a:blipFill>
         </p:spPr>
+        <p:txBody>
+          <a:bodyPr/>
+          <a:p/>
+        </p:txBody>
       </p:sp>
     </p:spTree>
   </p:cSld>
@@ -6759,6 +6436,10 @@
             </a:stretch>
           </a:blipFill>
         </p:spPr>
+        <p:txBody>
+          <a:bodyPr/>
+          <a:p/>
+        </p:txBody>
       </p:sp>
       <p:grpSp>
         <p:nvGrpSpPr>
@@ -6931,6 +6612,10 @@
             <a:miter/>
           </a:ln>
         </p:spPr>
+        <p:txBody>
+          <a:bodyPr/>
+          <a:p/>
+        </p:txBody>
       </p:sp>
       <p:sp>
         <p:nvSpPr>
@@ -6988,6 +6673,10 @@
             <a:miter/>
           </a:ln>
         </p:spPr>
+        <p:txBody>
+          <a:bodyPr/>
+          <a:p/>
+        </p:txBody>
       </p:sp>
       <p:sp>
         <p:nvSpPr>
@@ -7045,6 +6734,10 @@
             <a:miter/>
           </a:ln>
         </p:spPr>
+        <p:txBody>
+          <a:bodyPr/>
+          <a:p/>
+        </p:txBody>
       </p:sp>
       <p:sp>
         <p:nvSpPr>
@@ -7102,6 +6795,10 @@
             <a:miter/>
           </a:ln>
         </p:spPr>
+        <p:txBody>
+          <a:bodyPr/>
+          <a:p/>
+        </p:txBody>
       </p:sp>
       <p:sp>
         <p:nvSpPr>
@@ -7123,37 +6820,7 @@
             <a:spAutoFit/>
           </a:bodyPr>
           <a:lstStyle/>
-          <a:p>
-            <a:pPr algn="l">
-              <a:lnSpc>
-                <a:spcPts val="5915"/>
-              </a:lnSpc>
-            </a:pPr>
-            <a:r>
-              <a:rPr lang="en-US" sz="6500" b="true">
-                <a:solidFill>
-                  <a:srgbClr val="011142"/>
-                </a:solidFill>
-                <a:latin typeface="TT Firs Neue Bold"/>
-                <a:ea typeface="TT Firs Neue Bold"/>
-                <a:cs typeface="TT Firs Neue Bold"/>
-                <a:sym typeface="TT Firs Neue Bold"/>
-              </a:rPr>
-              <a:t>Examples of Cyber Atta</a:t>
-            </a:r>
-            <a:r>
-              <a:rPr lang="en-US" sz="6500" b="true">
-                <a:solidFill>
-                  <a:srgbClr val="011142"/>
-                </a:solidFill>
-                <a:latin typeface="TT Firs Neue Bold"/>
-                <a:ea typeface="TT Firs Neue Bold"/>
-                <a:cs typeface="TT Firs Neue Bold"/>
-                <a:sym typeface="TT Firs Neue Bold"/>
-              </a:rPr>
-              <a:t>cks</a:t>
-            </a:r>
-          </a:p>
+          <a:p/>
         </p:txBody>
       </p:sp>
       <p:sp>
@@ -7176,37 +6843,7 @@
             <a:spAutoFit/>
           </a:bodyPr>
           <a:lstStyle/>
-          <a:p>
-            <a:pPr algn="l">
-              <a:lnSpc>
-                <a:spcPts val="5915"/>
-              </a:lnSpc>
-            </a:pPr>
-            <a:r>
-              <a:rPr lang="en-US" sz="6500">
-                <a:solidFill>
-                  <a:srgbClr val="011142"/>
-                </a:solidFill>
-                <a:latin typeface="TT Firs Neue"/>
-                <a:ea typeface="TT Firs Neue"/>
-                <a:cs typeface="TT Firs Neue"/>
-                <a:sym typeface="TT Firs Neue"/>
-              </a:rPr>
-              <a:t>Real-</a:t>
-            </a:r>
-            <a:r>
-              <a:rPr lang="en-US" sz="6500">
-                <a:solidFill>
-                  <a:srgbClr val="011142"/>
-                </a:solidFill>
-                <a:latin typeface="TT Firs Neue"/>
-                <a:ea typeface="TT Firs Neue"/>
-                <a:cs typeface="TT Firs Neue"/>
-                <a:sym typeface="TT Firs Neue"/>
-              </a:rPr>
-              <a:t>World</a:t>
-            </a:r>
-          </a:p>
+          <a:p/>
         </p:txBody>
       </p:sp>
       <p:sp>
@@ -7229,25 +6866,7 @@
             <a:spAutoFit/>
           </a:bodyPr>
           <a:lstStyle/>
-          <a:p>
-            <a:pPr algn="l">
-              <a:lnSpc>
-                <a:spcPts val="2800"/>
-              </a:lnSpc>
-            </a:pPr>
-            <a:r>
-              <a:rPr lang="en-US" sz="2000">
-                <a:solidFill>
-                  <a:srgbClr val="011142"/>
-                </a:solidFill>
-                <a:latin typeface="TT Firs Neue"/>
-                <a:ea typeface="TT Firs Neue"/>
-                <a:cs typeface="TT Firs Neue"/>
-                <a:sym typeface="TT Firs Neue"/>
-              </a:rPr>
-              <a:t>Lorem ipsum dolor sit amet, consectetur adipiscing elit, sed do eiusmod tempor incididunt ut labore et dolore magna aliqua.</a:t>
-            </a:r>
-          </a:p>
+          <a:p/>
         </p:txBody>
       </p:sp>
       <p:sp>
@@ -7270,25 +6889,7 @@
             <a:spAutoFit/>
           </a:bodyPr>
           <a:lstStyle/>
-          <a:p>
-            <a:pPr algn="l">
-              <a:lnSpc>
-                <a:spcPts val="2800"/>
-              </a:lnSpc>
-            </a:pPr>
-            <a:r>
-              <a:rPr lang="en-US" sz="2000">
-                <a:solidFill>
-                  <a:srgbClr val="011142"/>
-                </a:solidFill>
-                <a:latin typeface="TT Firs Neue"/>
-                <a:ea typeface="TT Firs Neue"/>
-                <a:cs typeface="TT Firs Neue"/>
-                <a:sym typeface="TT Firs Neue"/>
-              </a:rPr>
-              <a:t>Lorem ipsum dolor sit amet, consectetur adipiscing elit, sed do eiusmod tempor incididunt ut labore et dolore magna aliqua.</a:t>
-            </a:r>
-          </a:p>
+          <a:p/>
         </p:txBody>
       </p:sp>
       <p:sp>
@@ -7342,6 +6943,10 @@
             </a:stretch>
           </a:blipFill>
         </p:spPr>
+        <p:txBody>
+          <a:bodyPr/>
+          <a:p/>
+        </p:txBody>
       </p:sp>
       <p:sp>
         <p:nvSpPr>
@@ -7399,6 +7004,10 @@
             <a:miter/>
           </a:ln>
         </p:spPr>
+        <p:txBody>
+          <a:bodyPr/>
+          <a:p/>
+        </p:txBody>
       </p:sp>
     </p:spTree>
   </p:cSld>
@@ -7612,6 +7221,10 @@
             <a:miter/>
           </a:ln>
         </p:spPr>
+        <p:txBody>
+          <a:bodyPr/>
+          <a:p/>
+        </p:txBody>
       </p:sp>
       <p:sp>
         <p:nvSpPr>
@@ -7669,6 +7282,10 @@
             <a:miter/>
           </a:ln>
         </p:spPr>
+        <p:txBody>
+          <a:bodyPr/>
+          <a:p/>
+        </p:txBody>
       </p:sp>
       <p:sp>
         <p:nvSpPr>
@@ -7690,25 +7307,7 @@
             <a:spAutoFit/>
           </a:bodyPr>
           <a:lstStyle/>
-          <a:p>
-            <a:pPr algn="l">
-              <a:lnSpc>
-                <a:spcPts val="5915"/>
-              </a:lnSpc>
-            </a:pPr>
-            <a:r>
-              <a:rPr lang="en-US" sz="6500" b="true">
-                <a:solidFill>
-                  <a:srgbClr val="011142"/>
-                </a:solidFill>
-                <a:latin typeface="TT Firs Neue Bold"/>
-                <a:ea typeface="TT Firs Neue Bold"/>
-                <a:cs typeface="TT Firs Neue Bold"/>
-                <a:sym typeface="TT Firs Neue Bold"/>
-              </a:rPr>
-              <a:t>Cyber Security</a:t>
-            </a:r>
-          </a:p>
+          <a:p/>
         </p:txBody>
       </p:sp>
       <p:sp>
@@ -7731,37 +7330,7 @@
             <a:spAutoFit/>
           </a:bodyPr>
           <a:lstStyle/>
-          <a:p>
-            <a:pPr algn="l">
-              <a:lnSpc>
-                <a:spcPts val="5915"/>
-              </a:lnSpc>
-            </a:pPr>
-            <a:r>
-              <a:rPr lang="en-US" sz="6500">
-                <a:solidFill>
-                  <a:srgbClr val="011142"/>
-                </a:solidFill>
-                <a:latin typeface="TT Firs Neue"/>
-                <a:ea typeface="TT Firs Neue"/>
-                <a:cs typeface="TT Firs Neue"/>
-                <a:sym typeface="TT Firs Neue"/>
-              </a:rPr>
-              <a:t>Impor</a:t>
-            </a:r>
-            <a:r>
-              <a:rPr lang="en-US" sz="6500">
-                <a:solidFill>
-                  <a:srgbClr val="011142"/>
-                </a:solidFill>
-                <a:latin typeface="TT Firs Neue"/>
-                <a:ea typeface="TT Firs Neue"/>
-                <a:cs typeface="TT Firs Neue"/>
-                <a:sym typeface="TT Firs Neue"/>
-              </a:rPr>
-              <a:t>tance of</a:t>
-            </a:r>
-          </a:p>
+          <a:p/>
         </p:txBody>
       </p:sp>
       <p:sp>
@@ -7784,25 +7353,7 @@
             <a:spAutoFit/>
           </a:bodyPr>
           <a:lstStyle/>
-          <a:p>
-            <a:pPr algn="l">
-              <a:lnSpc>
-                <a:spcPts val="2800"/>
-              </a:lnSpc>
-            </a:pPr>
-            <a:r>
-              <a:rPr lang="en-US" sz="2000">
-                <a:solidFill>
-                  <a:srgbClr val="011142"/>
-                </a:solidFill>
-                <a:latin typeface="TT Firs Neue"/>
-                <a:ea typeface="TT Firs Neue"/>
-                <a:cs typeface="TT Firs Neue"/>
-                <a:sym typeface="TT Firs Neue"/>
-              </a:rPr>
-              <a:t>Lorem ipsum dolor sit amet, consectetur adipiscing elit, sed do eiusmod tempor incididunt ut labore et dolore magna aliqua. Ut enim ad minim veniam, quis nostrud exercitation ullamco laboris nisi ut aliquip ex ea commodo consequat.</a:t>
-            </a:r>
-          </a:p>
+          <a:p/>
         </p:txBody>
       </p:sp>
       <p:sp>
@@ -7825,25 +7376,7 @@
             <a:spAutoFit/>
           </a:bodyPr>
           <a:lstStyle/>
-          <a:p>
-            <a:pPr algn="l">
-              <a:lnSpc>
-                <a:spcPts val="2800"/>
-              </a:lnSpc>
-            </a:pPr>
-            <a:r>
-              <a:rPr lang="en-US" sz="2000">
-                <a:solidFill>
-                  <a:srgbClr val="011142"/>
-                </a:solidFill>
-                <a:latin typeface="TT Firs Neue"/>
-                <a:ea typeface="TT Firs Neue"/>
-                <a:cs typeface="TT Firs Neue"/>
-                <a:sym typeface="TT Firs Neue"/>
-              </a:rPr>
-              <a:t>Lorem ipsum dolor sit amet, consectetur adipiscing elit, sed do eiusmod tempor incididunt ut labore et dolore magna aliqua. Ut enim ad minim veniam, quis nostrud exercitation ullamco laboris nisi ut aliquip ex ea commodo consequat.</a:t>
-            </a:r>
-          </a:p>
+          <a:p/>
         </p:txBody>
       </p:sp>
       <p:sp>
@@ -7897,6 +7430,10 @@
             </a:stretch>
           </a:blipFill>
         </p:spPr>
+        <p:txBody>
+          <a:bodyPr/>
+          <a:p/>
+        </p:txBody>
       </p:sp>
     </p:spTree>
   </p:cSld>
@@ -8105,6 +7642,10 @@
             </a:stretch>
           </a:blipFill>
         </p:spPr>
+        <p:txBody>
+          <a:bodyPr/>
+          <a:p/>
+        </p:txBody>
       </p:sp>
       <p:sp>
         <p:nvSpPr>
@@ -8162,6 +7703,10 @@
             <a:miter/>
           </a:ln>
         </p:spPr>
+        <p:txBody>
+          <a:bodyPr/>
+          <a:p/>
+        </p:txBody>
       </p:sp>
       <p:sp>
         <p:nvSpPr>
@@ -8219,6 +7764,10 @@
             <a:miter/>
           </a:ln>
         </p:spPr>
+        <p:txBody>
+          <a:bodyPr/>
+          <a:p/>
+        </p:txBody>
       </p:sp>
       <p:sp>
         <p:nvSpPr>
@@ -8240,37 +7789,7 @@
             <a:spAutoFit/>
           </a:bodyPr>
           <a:lstStyle/>
-          <a:p>
-            <a:pPr algn="l">
-              <a:lnSpc>
-                <a:spcPts val="5915"/>
-              </a:lnSpc>
-            </a:pPr>
-            <a:r>
-              <a:rPr lang="en-US" sz="6500" b="true">
-                <a:solidFill>
-                  <a:srgbClr val="011142"/>
-                </a:solidFill>
-                <a:latin typeface="TT Firs Neue Bold"/>
-                <a:ea typeface="TT Firs Neue Bold"/>
-                <a:cs typeface="TT Firs Neue Bold"/>
-                <a:sym typeface="TT Firs Neue Bold"/>
-              </a:rPr>
-              <a:t>Best Pra</a:t>
-            </a:r>
-            <a:r>
-              <a:rPr lang="en-US" sz="6500" b="true">
-                <a:solidFill>
-                  <a:srgbClr val="011142"/>
-                </a:solidFill>
-                <a:latin typeface="TT Firs Neue Bold"/>
-                <a:ea typeface="TT Firs Neue Bold"/>
-                <a:cs typeface="TT Firs Neue Bold"/>
-                <a:sym typeface="TT Firs Neue Bold"/>
-              </a:rPr>
-              <a:t>ctices</a:t>
-            </a:r>
-          </a:p>
+          <a:p/>
         </p:txBody>
       </p:sp>
       <p:sp>
@@ -8293,25 +7812,7 @@
             <a:spAutoFit/>
           </a:bodyPr>
           <a:lstStyle/>
-          <a:p>
-            <a:pPr algn="l">
-              <a:lnSpc>
-                <a:spcPts val="5915"/>
-              </a:lnSpc>
-            </a:pPr>
-            <a:r>
-              <a:rPr lang="en-US" sz="6500">
-                <a:solidFill>
-                  <a:srgbClr val="011142"/>
-                </a:solidFill>
-                <a:latin typeface="TT Firs Neue"/>
-                <a:ea typeface="TT Firs Neue"/>
-                <a:cs typeface="TT Firs Neue"/>
-                <a:sym typeface="TT Firs Neue"/>
-              </a:rPr>
-              <a:t>Cyber Security</a:t>
-            </a:r>
-          </a:p>
+          <a:p/>
         </p:txBody>
       </p:sp>
       <p:sp>
@@ -8334,25 +7835,7 @@
             <a:spAutoFit/>
           </a:bodyPr>
           <a:lstStyle/>
-          <a:p>
-            <a:pPr algn="l">
-              <a:lnSpc>
-                <a:spcPts val="2800"/>
-              </a:lnSpc>
-            </a:pPr>
-            <a:r>
-              <a:rPr lang="en-US" sz="2000">
-                <a:solidFill>
-                  <a:srgbClr val="011142"/>
-                </a:solidFill>
-                <a:latin typeface="TT Firs Neue"/>
-                <a:ea typeface="TT Firs Neue"/>
-                <a:cs typeface="TT Firs Neue"/>
-                <a:sym typeface="TT Firs Neue"/>
-              </a:rPr>
-              <a:t>Lorem ipsum dolor sit amet, consectetur adipiscing elit, sed do eiusmod tempor incididunt ut labore et dolore magna aliqua. Ut enim ad minim veniam, quis nostrud exercitation ullamco laboris nisi ut aliquip ex ea commodo consequat.</a:t>
-            </a:r>
-          </a:p>
+          <a:p/>
         </p:txBody>
       </p:sp>
       <p:sp>
@@ -8375,25 +7858,7 @@
             <a:spAutoFit/>
           </a:bodyPr>
           <a:lstStyle/>
-          <a:p>
-            <a:pPr algn="l">
-              <a:lnSpc>
-                <a:spcPts val="2800"/>
-              </a:lnSpc>
-            </a:pPr>
-            <a:r>
-              <a:rPr lang="en-US" sz="2000">
-                <a:solidFill>
-                  <a:srgbClr val="011142"/>
-                </a:solidFill>
-                <a:latin typeface="TT Firs Neue"/>
-                <a:ea typeface="TT Firs Neue"/>
-                <a:cs typeface="TT Firs Neue"/>
-                <a:sym typeface="TT Firs Neue"/>
-              </a:rPr>
-              <a:t>Lorem ipsum dolor sit amet, consectetur adipiscing elit, sed do eiusmod tempor incididunt ut labore et dolore magna aliqua. Ut enim ad minim veniam, quis nostrud exercitation ullamco laboris nisi ut aliquip ex ea commodo consequat.</a:t>
-            </a:r>
-          </a:p>
+          <a:p/>
         </p:txBody>
       </p:sp>
       <p:sp>
@@ -8452,6 +7917,10 @@
             <a:miter/>
           </a:ln>
         </p:spPr>
+        <p:txBody>
+          <a:bodyPr/>
+          <a:p/>
+        </p:txBody>
       </p:sp>
     </p:spTree>
   </p:cSld>
@@ -8665,6 +8134,10 @@
             <a:miter/>
           </a:ln>
         </p:spPr>
+        <p:txBody>
+          <a:bodyPr/>
+          <a:p/>
+        </p:txBody>
       </p:sp>
       <p:sp>
         <p:nvSpPr>
@@ -8686,37 +8159,7 @@
             <a:spAutoFit/>
           </a:bodyPr>
           <a:lstStyle/>
-          <a:p>
-            <a:pPr algn="l">
-              <a:lnSpc>
-                <a:spcPts val="5915"/>
-              </a:lnSpc>
-            </a:pPr>
-            <a:r>
-              <a:rPr lang="en-US" sz="6500" b="true">
-                <a:solidFill>
-                  <a:srgbClr val="011142"/>
-                </a:solidFill>
-                <a:latin typeface="TT Firs Neue Bold"/>
-                <a:ea typeface="TT Firs Neue Bold"/>
-                <a:cs typeface="TT Firs Neue Bold"/>
-                <a:sym typeface="TT Firs Neue Bold"/>
-              </a:rPr>
-              <a:t>Organiza</a:t>
-            </a:r>
-            <a:r>
-              <a:rPr lang="en-US" sz="6500" b="true">
-                <a:solidFill>
-                  <a:srgbClr val="011142"/>
-                </a:solidFill>
-                <a:latin typeface="TT Firs Neue Bold"/>
-                <a:ea typeface="TT Firs Neue Bold"/>
-                <a:cs typeface="TT Firs Neue Bold"/>
-                <a:sym typeface="TT Firs Neue Bold"/>
-              </a:rPr>
-              <a:t>tions</a:t>
-            </a:r>
-          </a:p>
+          <a:p/>
         </p:txBody>
       </p:sp>
       <p:sp>
@@ -8739,25 +8182,7 @@
             <a:spAutoFit/>
           </a:bodyPr>
           <a:lstStyle/>
-          <a:p>
-            <a:pPr algn="l">
-              <a:lnSpc>
-                <a:spcPts val="5915"/>
-              </a:lnSpc>
-            </a:pPr>
-            <a:r>
-              <a:rPr lang="en-US" sz="6500">
-                <a:solidFill>
-                  <a:srgbClr val="011142"/>
-                </a:solidFill>
-                <a:latin typeface="TT Firs Neue"/>
-                <a:ea typeface="TT Firs Neue"/>
-                <a:cs typeface="TT Firs Neue"/>
-                <a:sym typeface="TT Firs Neue"/>
-              </a:rPr>
-              <a:t>Role of</a:t>
-            </a:r>
-          </a:p>
+          <a:p/>
         </p:txBody>
       </p:sp>
       <p:sp>
@@ -8780,25 +8205,7 @@
             <a:spAutoFit/>
           </a:bodyPr>
           <a:lstStyle/>
-          <a:p>
-            <a:pPr algn="l">
-              <a:lnSpc>
-                <a:spcPts val="2800"/>
-              </a:lnSpc>
-            </a:pPr>
-            <a:r>
-              <a:rPr lang="en-US" sz="2000">
-                <a:solidFill>
-                  <a:srgbClr val="011142"/>
-                </a:solidFill>
-                <a:latin typeface="TT Firs Neue"/>
-                <a:ea typeface="TT Firs Neue"/>
-                <a:cs typeface="TT Firs Neue"/>
-                <a:sym typeface="TT Firs Neue"/>
-              </a:rPr>
-              <a:t>Lorem ipsum dolor sit amet, consectetur adipiscing elit, sed do eiusmod tempor incididunt ut labore et dolore magna aliqua. Ut enim ad minim veniam, quis nostrud exercitation ullamco laboris nisi ut aliquip ex ea commodo consequat.</a:t>
-            </a:r>
-          </a:p>
+          <a:p/>
         </p:txBody>
       </p:sp>
       <p:sp>
@@ -8821,25 +8228,7 @@
             <a:spAutoFit/>
           </a:bodyPr>
           <a:lstStyle/>
-          <a:p>
-            <a:pPr algn="l">
-              <a:lnSpc>
-                <a:spcPts val="2800"/>
-              </a:lnSpc>
-            </a:pPr>
-            <a:r>
-              <a:rPr lang="en-US" sz="2000">
-                <a:solidFill>
-                  <a:srgbClr val="011142"/>
-                </a:solidFill>
-                <a:latin typeface="TT Firs Neue"/>
-                <a:ea typeface="TT Firs Neue"/>
-                <a:cs typeface="TT Firs Neue"/>
-                <a:sym typeface="TT Firs Neue"/>
-              </a:rPr>
-              <a:t>Lorem ipsum dolor sit amet, consectetur adipiscing elit, sed do eiusmod tempor incididunt ut labore et dolore magna aliqua. Ut enim ad minim veniam, quis nostrud exercitation ullamco laboris nisi ut aliquip ex ea commodo consequat.</a:t>
-            </a:r>
-          </a:p>
+          <a:p/>
         </p:txBody>
       </p:sp>
       <p:sp>
@@ -8893,6 +8282,10 @@
             </a:stretch>
           </a:blipFill>
         </p:spPr>
+        <p:txBody>
+          <a:bodyPr/>
+          <a:p/>
+        </p:txBody>
       </p:sp>
       <p:sp>
         <p:nvSpPr>
@@ -8950,6 +8343,10 @@
             <a:miter/>
           </a:ln>
         </p:spPr>
+        <p:txBody>
+          <a:bodyPr/>
+          <a:p/>
+        </p:txBody>
       </p:sp>
     </p:spTree>
   </p:cSld>
@@ -9163,6 +8560,10 @@
             <a:miter/>
           </a:ln>
         </p:spPr>
+        <p:txBody>
+          <a:bodyPr/>
+          <a:p/>
+        </p:txBody>
       </p:sp>
       <p:sp>
         <p:nvSpPr>
@@ -9220,6 +8621,10 @@
             <a:miter/>
           </a:ln>
         </p:spPr>
+        <p:txBody>
+          <a:bodyPr/>
+          <a:p/>
+        </p:txBody>
       </p:sp>
       <p:sp>
         <p:nvSpPr>
@@ -9277,6 +8682,10 @@
             <a:miter/>
           </a:ln>
         </p:spPr>
+        <p:txBody>
+          <a:bodyPr/>
+          <a:p/>
+        </p:txBody>
       </p:sp>
       <p:sp>
         <p:nvSpPr>
@@ -9334,6 +8743,10 @@
             <a:miter/>
           </a:ln>
         </p:spPr>
+        <p:txBody>
+          <a:bodyPr/>
+          <a:p/>
+        </p:txBody>
       </p:sp>
       <p:sp>
         <p:nvSpPr>
@@ -9391,6 +8804,10 @@
             <a:miter/>
           </a:ln>
         </p:spPr>
+        <p:txBody>
+          <a:bodyPr/>
+          <a:p/>
+        </p:txBody>
       </p:sp>
       <p:sp>
         <p:nvSpPr>
@@ -9412,25 +8829,7 @@
             <a:spAutoFit/>
           </a:bodyPr>
           <a:lstStyle/>
-          <a:p>
-            <a:pPr algn="l">
-              <a:lnSpc>
-                <a:spcPts val="5915"/>
-              </a:lnSpc>
-            </a:pPr>
-            <a:r>
-              <a:rPr lang="en-US" sz="6500">
-                <a:solidFill>
-                  <a:srgbClr val="011142"/>
-                </a:solidFill>
-                <a:latin typeface="TT Firs Neue"/>
-                <a:ea typeface="TT Firs Neue"/>
-                <a:cs typeface="TT Firs Neue"/>
-                <a:sym typeface="TT Firs Neue"/>
-              </a:rPr>
-              <a:t>Emerging Trends in </a:t>
-            </a:r>
-          </a:p>
+          <a:p/>
         </p:txBody>
       </p:sp>
       <p:sp>
@@ -9453,37 +8852,7 @@
             <a:spAutoFit/>
           </a:bodyPr>
           <a:lstStyle/>
-          <a:p>
-            <a:pPr algn="l">
-              <a:lnSpc>
-                <a:spcPts val="5915"/>
-              </a:lnSpc>
-            </a:pPr>
-            <a:r>
-              <a:rPr lang="en-US" sz="6500" b="true">
-                <a:solidFill>
-                  <a:srgbClr val="011142"/>
-                </a:solidFill>
-                <a:latin typeface="TT Firs Neue Bold"/>
-                <a:ea typeface="TT Firs Neue Bold"/>
-                <a:cs typeface="TT Firs Neue Bold"/>
-                <a:sym typeface="TT Firs Neue Bold"/>
-              </a:rPr>
-              <a:t>Cyber Securi</a:t>
-            </a:r>
-            <a:r>
-              <a:rPr lang="en-US" sz="6500" b="true">
-                <a:solidFill>
-                  <a:srgbClr val="011142"/>
-                </a:solidFill>
-                <a:latin typeface="TT Firs Neue Bold"/>
-                <a:ea typeface="TT Firs Neue Bold"/>
-                <a:cs typeface="TT Firs Neue Bold"/>
-                <a:sym typeface="TT Firs Neue Bold"/>
-              </a:rPr>
-              <a:t>ty</a:t>
-            </a:r>
-          </a:p>
+          <a:p/>
         </p:txBody>
       </p:sp>
       <p:sp>
@@ -9506,25 +8875,7 @@
             <a:spAutoFit/>
           </a:bodyPr>
           <a:lstStyle/>
-          <a:p>
-            <a:pPr algn="l">
-              <a:lnSpc>
-                <a:spcPts val="2800"/>
-              </a:lnSpc>
-            </a:pPr>
-            <a:r>
-              <a:rPr lang="en-US" sz="2000">
-                <a:solidFill>
-                  <a:srgbClr val="011142"/>
-                </a:solidFill>
-                <a:latin typeface="TT Firs Neue"/>
-                <a:ea typeface="TT Firs Neue"/>
-                <a:cs typeface="TT Firs Neue"/>
-                <a:sym typeface="TT Firs Neue"/>
-              </a:rPr>
-              <a:t>Lorem ipsum dolor sit amet, consectetur adipiscing elit, sed do eiusmod tempor incididunt ut labore et dolore magna aliqua. Ut enim ad minim veniam, quis nostrud exercitation ullamco laboris nisi ut aliquip ex ea commodo consequat.</a:t>
-            </a:r>
-          </a:p>
+          <a:p/>
         </p:txBody>
       </p:sp>
       <p:sp>
@@ -9547,25 +8898,7 @@
             <a:spAutoFit/>
           </a:bodyPr>
           <a:lstStyle/>
-          <a:p>
-            <a:pPr algn="l">
-              <a:lnSpc>
-                <a:spcPts val="2800"/>
-              </a:lnSpc>
-            </a:pPr>
-            <a:r>
-              <a:rPr lang="en-US" sz="2000">
-                <a:solidFill>
-                  <a:srgbClr val="011142"/>
-                </a:solidFill>
-                <a:latin typeface="TT Firs Neue"/>
-                <a:ea typeface="TT Firs Neue"/>
-                <a:cs typeface="TT Firs Neue"/>
-                <a:sym typeface="TT Firs Neue"/>
-              </a:rPr>
-              <a:t>Lorem ipsum dolor sit amet, consectetur adipiscing elit, sed do eiusmod tempor incididunt ut labore et dolore magna aliqua. Ut enim ad minim veniam, quis nostrud exercitation ullamco laboris nisi ut aliquip ex ea commodo consequat.</a:t>
-            </a:r>
-          </a:p>
+          <a:p/>
         </p:txBody>
       </p:sp>
       <p:sp>
@@ -9619,6 +8952,10 @@
             </a:stretch>
           </a:blipFill>
         </p:spPr>
+        <p:txBody>
+          <a:bodyPr/>
+          <a:p/>
+        </p:txBody>
       </p:sp>
       <p:sp>
         <p:nvSpPr>
@@ -9676,6 +9013,10 @@
             <a:miter/>
           </a:ln>
         </p:spPr>
+        <p:txBody>
+          <a:bodyPr/>
+          <a:p/>
+        </p:txBody>
       </p:sp>
     </p:spTree>
   </p:cSld>
@@ -10014,6 +9355,10 @@
             <a:miter/>
           </a:ln>
         </p:spPr>
+        <p:txBody>
+          <a:bodyPr/>
+          <a:p/>
+        </p:txBody>
       </p:sp>
       <p:grpSp>
         <p:nvGrpSpPr>
@@ -10148,6 +9493,10 @@
             </a:stretch>
           </a:blipFill>
         </p:spPr>
+        <p:txBody>
+          <a:bodyPr/>
+          <a:p/>
+        </p:txBody>
       </p:sp>
       <p:sp>
         <p:nvSpPr>
@@ -10169,25 +9518,7 @@
             <a:spAutoFit/>
           </a:bodyPr>
           <a:lstStyle/>
-          <a:p>
-            <a:pPr algn="ctr">
-              <a:lnSpc>
-                <a:spcPts val="5915"/>
-              </a:lnSpc>
-            </a:pPr>
-            <a:r>
-              <a:rPr lang="en-US" b="true" sz="6500">
-                <a:solidFill>
-                  <a:srgbClr val="011142"/>
-                </a:solidFill>
-                <a:latin typeface="TT Firs Neue Bold"/>
-                <a:ea typeface="TT Firs Neue Bold"/>
-                <a:cs typeface="TT Firs Neue Bold"/>
-                <a:sym typeface="TT Firs Neue Bold"/>
-              </a:rPr>
-              <a:t>Conclusion</a:t>
-            </a:r>
-          </a:p>
+          <a:p/>
         </p:txBody>
       </p:sp>
       <p:sp>
@@ -10210,25 +9541,7 @@
             <a:spAutoFit/>
           </a:bodyPr>
           <a:lstStyle/>
-          <a:p>
-            <a:pPr algn="ctr">
-              <a:lnSpc>
-                <a:spcPts val="2800"/>
-              </a:lnSpc>
-            </a:pPr>
-            <a:r>
-              <a:rPr lang="en-US" sz="2000">
-                <a:solidFill>
-                  <a:srgbClr val="011142"/>
-                </a:solidFill>
-                <a:latin typeface="TT Firs Neue"/>
-                <a:ea typeface="TT Firs Neue"/>
-                <a:cs typeface="TT Firs Neue"/>
-                <a:sym typeface="TT Firs Neue"/>
-              </a:rPr>
-              <a:t>Lorem ipsum dolor sit amet, consectetur adipiscing elit, sed do eiusmod tempor incididunt ut labore et dolore magna aliqua. Ut enim ad minim veniam, quis nostrud exercitation ullamco laboris nisi ut aliquip ex ea commodo consequat.</a:t>
-            </a:r>
-          </a:p>
+          <a:p/>
         </p:txBody>
       </p:sp>
       <p:sp>
@@ -10251,25 +9564,7 @@
             <a:spAutoFit/>
           </a:bodyPr>
           <a:lstStyle/>
-          <a:p>
-            <a:pPr algn="ctr">
-              <a:lnSpc>
-                <a:spcPts val="2800"/>
-              </a:lnSpc>
-            </a:pPr>
-            <a:r>
-              <a:rPr lang="en-US" sz="2000">
-                <a:solidFill>
-                  <a:srgbClr val="011142"/>
-                </a:solidFill>
-                <a:latin typeface="TT Firs Neue"/>
-                <a:ea typeface="TT Firs Neue"/>
-                <a:cs typeface="TT Firs Neue"/>
-                <a:sym typeface="TT Firs Neue"/>
-              </a:rPr>
-              <a:t>Lorem ipsum dolor sit amet, consectetur adipiscing elit, sed do eiusmod tempor incididunt ut labore et dolore magna aliqua. Ut enim ad minim veniam, quis nostrud exercitation ullamco laboris nisi ut aliquip ex ea commodo consequat.</a:t>
-            </a:r>
-          </a:p>
+          <a:p/>
         </p:txBody>
       </p:sp>
       <p:sp>
@@ -10323,6 +9618,10 @@
             </a:stretch>
           </a:blipFill>
         </p:spPr>
+        <p:txBody>
+          <a:bodyPr/>
+          <a:p/>
+        </p:txBody>
       </p:sp>
       <p:sp>
         <p:nvSpPr>
@@ -10380,6 +9679,10 @@
             <a:miter/>
           </a:ln>
         </p:spPr>
+        <p:txBody>
+          <a:bodyPr/>
+          <a:p/>
+        </p:txBody>
       </p:sp>
     </p:spTree>
   </p:cSld>
